--- a/ゲーム科1年/01_後期/プログラミングⅢ/19_auto型.pptx
+++ b/ゲーム科1年/01_後期/プログラミングⅢ/19_auto型.pptx
@@ -263,7 +263,7 @@
           <a:p>
             <a:fld id="{E9CC885B-4903-4D54-9A93-00025F12DED9}" type="datetimeFigureOut">
               <a:rPr kumimoji="1" lang="ja-JP" altLang="en-US" smtClean="0"/>
-              <a:t>2024/11/12</a:t>
+              <a:t>2025/3/3</a:t>
             </a:fld>
             <a:endParaRPr kumimoji="1" lang="ja-JP" altLang="en-US"/>
           </a:p>
@@ -493,7 +493,7 @@
           <a:p>
             <a:fld id="{E9CC885B-4903-4D54-9A93-00025F12DED9}" type="datetimeFigureOut">
               <a:rPr kumimoji="1" lang="ja-JP" altLang="en-US" smtClean="0"/>
-              <a:t>2024/11/12</a:t>
+              <a:t>2025/3/3</a:t>
             </a:fld>
             <a:endParaRPr kumimoji="1" lang="ja-JP" altLang="en-US"/>
           </a:p>
@@ -733,7 +733,7 @@
           <a:p>
             <a:fld id="{E9CC885B-4903-4D54-9A93-00025F12DED9}" type="datetimeFigureOut">
               <a:rPr kumimoji="1" lang="ja-JP" altLang="en-US" smtClean="0"/>
-              <a:t>2024/11/12</a:t>
+              <a:t>2025/3/3</a:t>
             </a:fld>
             <a:endParaRPr kumimoji="1" lang="ja-JP" altLang="en-US"/>
           </a:p>
@@ -963,7 +963,7 @@
           <a:p>
             <a:fld id="{E9CC885B-4903-4D54-9A93-00025F12DED9}" type="datetimeFigureOut">
               <a:rPr kumimoji="1" lang="ja-JP" altLang="en-US" smtClean="0"/>
-              <a:t>2024/11/12</a:t>
+              <a:t>2025/3/3</a:t>
             </a:fld>
             <a:endParaRPr kumimoji="1" lang="ja-JP" altLang="en-US"/>
           </a:p>
@@ -1238,7 +1238,7 @@
           <a:p>
             <a:fld id="{E9CC885B-4903-4D54-9A93-00025F12DED9}" type="datetimeFigureOut">
               <a:rPr kumimoji="1" lang="ja-JP" altLang="en-US" smtClean="0"/>
-              <a:t>2024/11/12</a:t>
+              <a:t>2025/3/3</a:t>
             </a:fld>
             <a:endParaRPr kumimoji="1" lang="ja-JP" altLang="en-US"/>
           </a:p>
@@ -1567,7 +1567,7 @@
           <a:p>
             <a:fld id="{E9CC885B-4903-4D54-9A93-00025F12DED9}" type="datetimeFigureOut">
               <a:rPr kumimoji="1" lang="ja-JP" altLang="en-US" smtClean="0"/>
-              <a:t>2024/11/12</a:t>
+              <a:t>2025/3/3</a:t>
             </a:fld>
             <a:endParaRPr kumimoji="1" lang="ja-JP" altLang="en-US"/>
           </a:p>
@@ -2043,7 +2043,7 @@
           <a:p>
             <a:fld id="{E9CC885B-4903-4D54-9A93-00025F12DED9}" type="datetimeFigureOut">
               <a:rPr kumimoji="1" lang="ja-JP" altLang="en-US" smtClean="0"/>
-              <a:t>2024/11/12</a:t>
+              <a:t>2025/3/3</a:t>
             </a:fld>
             <a:endParaRPr kumimoji="1" lang="ja-JP" altLang="en-US"/>
           </a:p>
@@ -2184,7 +2184,7 @@
           <a:p>
             <a:fld id="{E9CC885B-4903-4D54-9A93-00025F12DED9}" type="datetimeFigureOut">
               <a:rPr kumimoji="1" lang="ja-JP" altLang="en-US" smtClean="0"/>
-              <a:t>2024/11/12</a:t>
+              <a:t>2025/3/3</a:t>
             </a:fld>
             <a:endParaRPr kumimoji="1" lang="ja-JP" altLang="en-US"/>
           </a:p>
@@ -2297,7 +2297,7 @@
           <a:p>
             <a:fld id="{E9CC885B-4903-4D54-9A93-00025F12DED9}" type="datetimeFigureOut">
               <a:rPr kumimoji="1" lang="ja-JP" altLang="en-US" smtClean="0"/>
-              <a:t>2024/11/12</a:t>
+              <a:t>2025/3/3</a:t>
             </a:fld>
             <a:endParaRPr kumimoji="1" lang="ja-JP" altLang="en-US"/>
           </a:p>
@@ -2640,7 +2640,7 @@
           <a:p>
             <a:fld id="{E9CC885B-4903-4D54-9A93-00025F12DED9}" type="datetimeFigureOut">
               <a:rPr kumimoji="1" lang="ja-JP" altLang="en-US" smtClean="0"/>
-              <a:t>2024/11/12</a:t>
+              <a:t>2025/3/3</a:t>
             </a:fld>
             <a:endParaRPr kumimoji="1" lang="ja-JP" altLang="en-US"/>
           </a:p>
@@ -2928,7 +2928,7 @@
           <a:p>
             <a:fld id="{E9CC885B-4903-4D54-9A93-00025F12DED9}" type="datetimeFigureOut">
               <a:rPr kumimoji="1" lang="ja-JP" altLang="en-US" smtClean="0"/>
-              <a:t>2024/11/12</a:t>
+              <a:t>2025/3/3</a:t>
             </a:fld>
             <a:endParaRPr kumimoji="1" lang="ja-JP" altLang="en-US"/>
           </a:p>
@@ -3201,7 +3201,7 @@
           <a:p>
             <a:fld id="{E9CC885B-4903-4D54-9A93-00025F12DED9}" type="datetimeFigureOut">
               <a:rPr kumimoji="1" lang="ja-JP" altLang="en-US" smtClean="0"/>
-              <a:t>2024/11/12</a:t>
+              <a:t>2025/3/3</a:t>
             </a:fld>
             <a:endParaRPr kumimoji="1" lang="ja-JP" altLang="en-US"/>
           </a:p>
@@ -4447,7 +4447,7 @@
         <p:spPr>
           <a:xfrm>
             <a:off x="567541" y="4684804"/>
-            <a:ext cx="8186857" cy="1200329"/>
+            <a:ext cx="7263527" cy="1200329"/>
           </a:xfrm>
           <a:prstGeom prst="rect">
             <a:avLst/>
@@ -4466,7 +4466,7 @@
                   <a:srgbClr val="FF0000"/>
                 </a:solidFill>
               </a:rPr>
-              <a:t>Std::list&lt;int&gt;::iterator</a:t>
+              <a:t>std::list&lt;int&gt;::iterator</a:t>
             </a:r>
             <a:r>
               <a:rPr lang="ja-JP" altLang="en-US" sz="2400" b="1" dirty="0">
@@ -4495,7 +4495,19 @@
           <a:p>
             <a:r>
               <a:rPr lang="ja-JP" altLang="en-US" sz="2400" dirty="0"/>
-              <a:t>このように宣言が長くなるものなどにのみ使いましょう。</a:t>
+              <a:t>このように</a:t>
+            </a:r>
+            <a:r>
+              <a:rPr lang="ja-JP" altLang="en-US" sz="2400" b="1" dirty="0">
+                <a:solidFill>
+                  <a:srgbClr val="FF0000"/>
+                </a:solidFill>
+              </a:rPr>
+              <a:t>宣言が長くなるもの</a:t>
+            </a:r>
+            <a:r>
+              <a:rPr lang="ja-JP" altLang="en-US" sz="2400" dirty="0"/>
+              <a:t>のみ使いましょう。</a:t>
             </a:r>
             <a:endParaRPr lang="en-US" altLang="ja-JP" sz="2400" dirty="0"/>
           </a:p>
